--- a/(9.2) 따라하기3.pptx
+++ b/(9.2) 따라하기3.pptx
@@ -124,6 +124,35 @@
 </p:presentation>
 </file>
 
+<file path=ppt/changesInfos/changesInfo1.xml><?xml version="1.0" encoding="utf-8"?>
+<pc:chgInfo xmlns:a="http://schemas.openxmlformats.org/drawingml/2006/main" xmlns:r="http://schemas.openxmlformats.org/officeDocument/2006/relationships" xmlns:ac="http://schemas.microsoft.com/office/drawing/2013/main/command" xmlns:pc="http://schemas.microsoft.com/office/powerpoint/2013/main/command">
+  <pc:docChgLst>
+    <pc:chgData name="musukie52@gmail.com" userId="017bd91f96aa8751" providerId="LiveId" clId="{5B2C3894-F97E-4CAB-8812-5BB4D83AAC6A}"/>
+    <pc:docChg chg="undo custSel modSld">
+      <pc:chgData name="musukie52@gmail.com" userId="017bd91f96aa8751" providerId="LiveId" clId="{5B2C3894-F97E-4CAB-8812-5BB4D83AAC6A}" dt="2026-09-03T01:57:54.947" v="1" actId="14100"/>
+      <pc:docMkLst>
+        <pc:docMk/>
+      </pc:docMkLst>
+      <pc:sldChg chg="modSp mod">
+        <pc:chgData name="musukie52@gmail.com" userId="017bd91f96aa8751" providerId="LiveId" clId="{5B2C3894-F97E-4CAB-8812-5BB4D83AAC6A}" dt="2026-09-03T01:57:54.947" v="1" actId="14100"/>
+        <pc:sldMkLst>
+          <pc:docMk/>
+          <pc:sldMk cId="3207106737" sldId="256"/>
+        </pc:sldMkLst>
+        <pc:picChg chg="mod">
+          <ac:chgData name="musukie52@gmail.com" userId="017bd91f96aa8751" providerId="LiveId" clId="{5B2C3894-F97E-4CAB-8812-5BB4D83AAC6A}" dt="2026-09-03T01:57:54.947" v="1" actId="14100"/>
+          <ac:picMkLst>
+            <pc:docMk/>
+            <pc:sldMk cId="3207106737" sldId="256"/>
+            <ac:picMk id="5" creationId="{00000000-0000-0000-0000-000000000000}"/>
+          </ac:picMkLst>
+        </pc:picChg>
+      </pc:sldChg>
+    </pc:docChg>
+  </pc:docChgLst>
+</pc:chgInfo>
+</file>
+
 <file path=ppt/slideLayouts/slideLayout1.xml><?xml version="1.0" encoding="utf-8"?>
 <p:sldLayout xmlns:a="http://schemas.openxmlformats.org/drawingml/2006/main" xmlns:r="http://schemas.openxmlformats.org/officeDocument/2006/relationships" xmlns:p="http://schemas.openxmlformats.org/presentationml/2006/main" type="title" preserve="1">
   <p:cSld name="제목 슬라이드">
@@ -166,10 +195,9 @@
           </a:lstStyle>
           <a:p>
             <a:r>
-              <a:rPr lang="ko-KR" altLang="en-US" smtClean="0"/>
+              <a:rPr lang="ko-KR" altLang="en-US"/>
               <a:t>마스터 제목 스타일 편집</a:t>
             </a:r>
-            <a:endParaRPr lang="ko-KR" altLang="en-US"/>
           </a:p>
         </p:txBody>
       </p:sp>
@@ -231,10 +259,9 @@
           </a:lstStyle>
           <a:p>
             <a:r>
-              <a:rPr lang="ko-KR" altLang="en-US" smtClean="0"/>
+              <a:rPr lang="ko-KR" altLang="en-US"/>
               <a:t>클릭하여 마스터 부제목 스타일 편집</a:t>
             </a:r>
-            <a:endParaRPr lang="ko-KR" altLang="en-US"/>
           </a:p>
         </p:txBody>
       </p:sp>
@@ -255,7 +282,7 @@
           <a:p>
             <a:fld id="{435661A6-29BF-4182-9B47-9153AD299389}" type="datetimeFigureOut">
               <a:rPr lang="ko-KR" altLang="en-US" smtClean="0"/>
-              <a:t>2026-09-02</a:t>
+              <a:t>2026-09-03</a:t>
             </a:fld>
             <a:endParaRPr lang="ko-KR" altLang="en-US"/>
           </a:p>
@@ -349,10 +376,9 @@
           <a:lstStyle/>
           <a:p>
             <a:r>
-              <a:rPr lang="ko-KR" altLang="en-US" smtClean="0"/>
+              <a:rPr lang="ko-KR" altLang="en-US"/>
               <a:t>마스터 제목 스타일 편집</a:t>
             </a:r>
-            <a:endParaRPr lang="ko-KR" altLang="en-US"/>
           </a:p>
         </p:txBody>
       </p:sp>
@@ -373,38 +399,37 @@
           <a:p>
             <a:pPr lvl="0"/>
             <a:r>
-              <a:rPr lang="ko-KR" altLang="en-US" smtClean="0"/>
+              <a:rPr lang="ko-KR" altLang="en-US"/>
               <a:t>마스터 텍스트 스타일 편집</a:t>
             </a:r>
           </a:p>
           <a:p>
             <a:pPr lvl="1"/>
             <a:r>
-              <a:rPr lang="ko-KR" altLang="en-US" smtClean="0"/>
+              <a:rPr lang="ko-KR" altLang="en-US"/>
               <a:t>둘째 수준</a:t>
             </a:r>
           </a:p>
           <a:p>
             <a:pPr lvl="2"/>
             <a:r>
-              <a:rPr lang="ko-KR" altLang="en-US" smtClean="0"/>
+              <a:rPr lang="ko-KR" altLang="en-US"/>
               <a:t>셋째 수준</a:t>
             </a:r>
           </a:p>
           <a:p>
             <a:pPr lvl="3"/>
             <a:r>
-              <a:rPr lang="ko-KR" altLang="en-US" smtClean="0"/>
+              <a:rPr lang="ko-KR" altLang="en-US"/>
               <a:t>넷째 수준</a:t>
             </a:r>
           </a:p>
           <a:p>
             <a:pPr lvl="4"/>
             <a:r>
-              <a:rPr lang="ko-KR" altLang="en-US" smtClean="0"/>
+              <a:rPr lang="ko-KR" altLang="en-US"/>
               <a:t>다섯째 수준</a:t>
             </a:r>
-            <a:endParaRPr lang="ko-KR" altLang="en-US"/>
           </a:p>
         </p:txBody>
       </p:sp>
@@ -425,7 +450,7 @@
           <a:p>
             <a:fld id="{435661A6-29BF-4182-9B47-9153AD299389}" type="datetimeFigureOut">
               <a:rPr lang="ko-KR" altLang="en-US" smtClean="0"/>
-              <a:t>2026-09-02</a:t>
+              <a:t>2026-09-03</a:t>
             </a:fld>
             <a:endParaRPr lang="ko-KR" altLang="en-US"/>
           </a:p>
@@ -524,10 +549,9 @@
           <a:lstStyle/>
           <a:p>
             <a:r>
-              <a:rPr lang="ko-KR" altLang="en-US" smtClean="0"/>
+              <a:rPr lang="ko-KR" altLang="en-US"/>
               <a:t>마스터 제목 스타일 편집</a:t>
             </a:r>
-            <a:endParaRPr lang="ko-KR" altLang="en-US"/>
           </a:p>
         </p:txBody>
       </p:sp>
@@ -553,38 +577,37 @@
           <a:p>
             <a:pPr lvl="0"/>
             <a:r>
-              <a:rPr lang="ko-KR" altLang="en-US" smtClean="0"/>
+              <a:rPr lang="ko-KR" altLang="en-US"/>
               <a:t>마스터 텍스트 스타일 편집</a:t>
             </a:r>
           </a:p>
           <a:p>
             <a:pPr lvl="1"/>
             <a:r>
-              <a:rPr lang="ko-KR" altLang="en-US" smtClean="0"/>
+              <a:rPr lang="ko-KR" altLang="en-US"/>
               <a:t>둘째 수준</a:t>
             </a:r>
           </a:p>
           <a:p>
             <a:pPr lvl="2"/>
             <a:r>
-              <a:rPr lang="ko-KR" altLang="en-US" smtClean="0"/>
+              <a:rPr lang="ko-KR" altLang="en-US"/>
               <a:t>셋째 수준</a:t>
             </a:r>
           </a:p>
           <a:p>
             <a:pPr lvl="3"/>
             <a:r>
-              <a:rPr lang="ko-KR" altLang="en-US" smtClean="0"/>
+              <a:rPr lang="ko-KR" altLang="en-US"/>
               <a:t>넷째 수준</a:t>
             </a:r>
           </a:p>
           <a:p>
             <a:pPr lvl="4"/>
             <a:r>
-              <a:rPr lang="ko-KR" altLang="en-US" smtClean="0"/>
+              <a:rPr lang="ko-KR" altLang="en-US"/>
               <a:t>다섯째 수준</a:t>
             </a:r>
-            <a:endParaRPr lang="ko-KR" altLang="en-US"/>
           </a:p>
         </p:txBody>
       </p:sp>
@@ -605,7 +628,7 @@
           <a:p>
             <a:fld id="{435661A6-29BF-4182-9B47-9153AD299389}" type="datetimeFigureOut">
               <a:rPr lang="ko-KR" altLang="en-US" smtClean="0"/>
-              <a:t>2026-09-02</a:t>
+              <a:t>2026-09-03</a:t>
             </a:fld>
             <a:endParaRPr lang="ko-KR" altLang="en-US"/>
           </a:p>
@@ -699,10 +722,9 @@
           <a:lstStyle/>
           <a:p>
             <a:r>
-              <a:rPr lang="ko-KR" altLang="en-US" smtClean="0"/>
+              <a:rPr lang="ko-KR" altLang="en-US"/>
               <a:t>마스터 제목 스타일 편집</a:t>
             </a:r>
-            <a:endParaRPr lang="ko-KR" altLang="en-US"/>
           </a:p>
         </p:txBody>
       </p:sp>
@@ -723,38 +745,37 @@
           <a:p>
             <a:pPr lvl="0"/>
             <a:r>
-              <a:rPr lang="ko-KR" altLang="en-US" smtClean="0"/>
+              <a:rPr lang="ko-KR" altLang="en-US"/>
               <a:t>마스터 텍스트 스타일 편집</a:t>
             </a:r>
           </a:p>
           <a:p>
             <a:pPr lvl="1"/>
             <a:r>
-              <a:rPr lang="ko-KR" altLang="en-US" smtClean="0"/>
+              <a:rPr lang="ko-KR" altLang="en-US"/>
               <a:t>둘째 수준</a:t>
             </a:r>
           </a:p>
           <a:p>
             <a:pPr lvl="2"/>
             <a:r>
-              <a:rPr lang="ko-KR" altLang="en-US" smtClean="0"/>
+              <a:rPr lang="ko-KR" altLang="en-US"/>
               <a:t>셋째 수준</a:t>
             </a:r>
           </a:p>
           <a:p>
             <a:pPr lvl="3"/>
             <a:r>
-              <a:rPr lang="ko-KR" altLang="en-US" smtClean="0"/>
+              <a:rPr lang="ko-KR" altLang="en-US"/>
               <a:t>넷째 수준</a:t>
             </a:r>
           </a:p>
           <a:p>
             <a:pPr lvl="4"/>
             <a:r>
-              <a:rPr lang="ko-KR" altLang="en-US" smtClean="0"/>
+              <a:rPr lang="ko-KR" altLang="en-US"/>
               <a:t>다섯째 수준</a:t>
             </a:r>
-            <a:endParaRPr lang="ko-KR" altLang="en-US"/>
           </a:p>
         </p:txBody>
       </p:sp>
@@ -775,7 +796,7 @@
           <a:p>
             <a:fld id="{435661A6-29BF-4182-9B47-9153AD299389}" type="datetimeFigureOut">
               <a:rPr lang="ko-KR" altLang="en-US" smtClean="0"/>
-              <a:t>2026-09-02</a:t>
+              <a:t>2026-09-03</a:t>
             </a:fld>
             <a:endParaRPr lang="ko-KR" altLang="en-US"/>
           </a:p>
@@ -878,10 +899,9 @@
           </a:lstStyle>
           <a:p>
             <a:r>
-              <a:rPr lang="ko-KR" altLang="en-US" smtClean="0"/>
+              <a:rPr lang="ko-KR" altLang="en-US"/>
               <a:t>마스터 제목 스타일 편집</a:t>
             </a:r>
-            <a:endParaRPr lang="ko-KR" altLang="en-US"/>
           </a:p>
         </p:txBody>
       </p:sp>
@@ -998,7 +1018,7 @@
           <a:p>
             <a:pPr lvl="0"/>
             <a:r>
-              <a:rPr lang="ko-KR" altLang="en-US" smtClean="0"/>
+              <a:rPr lang="ko-KR" altLang="en-US"/>
               <a:t>마스터 텍스트 스타일 편집</a:t>
             </a:r>
           </a:p>
@@ -1021,7 +1041,7 @@
           <a:p>
             <a:fld id="{435661A6-29BF-4182-9B47-9153AD299389}" type="datetimeFigureOut">
               <a:rPr lang="ko-KR" altLang="en-US" smtClean="0"/>
-              <a:t>2026-09-02</a:t>
+              <a:t>2026-09-03</a:t>
             </a:fld>
             <a:endParaRPr lang="ko-KR" altLang="en-US"/>
           </a:p>
@@ -1115,10 +1135,9 @@
           <a:lstStyle/>
           <a:p>
             <a:r>
-              <a:rPr lang="ko-KR" altLang="en-US" smtClean="0"/>
+              <a:rPr lang="ko-KR" altLang="en-US"/>
               <a:t>마스터 제목 스타일 편집</a:t>
             </a:r>
-            <a:endParaRPr lang="ko-KR" altLang="en-US"/>
           </a:p>
         </p:txBody>
       </p:sp>
@@ -1144,38 +1163,37 @@
           <a:p>
             <a:pPr lvl="0"/>
             <a:r>
-              <a:rPr lang="ko-KR" altLang="en-US" smtClean="0"/>
+              <a:rPr lang="ko-KR" altLang="en-US"/>
               <a:t>마스터 텍스트 스타일 편집</a:t>
             </a:r>
           </a:p>
           <a:p>
             <a:pPr lvl="1"/>
             <a:r>
-              <a:rPr lang="ko-KR" altLang="en-US" smtClean="0"/>
+              <a:rPr lang="ko-KR" altLang="en-US"/>
               <a:t>둘째 수준</a:t>
             </a:r>
           </a:p>
           <a:p>
             <a:pPr lvl="2"/>
             <a:r>
-              <a:rPr lang="ko-KR" altLang="en-US" smtClean="0"/>
+              <a:rPr lang="ko-KR" altLang="en-US"/>
               <a:t>셋째 수준</a:t>
             </a:r>
           </a:p>
           <a:p>
             <a:pPr lvl="3"/>
             <a:r>
-              <a:rPr lang="ko-KR" altLang="en-US" smtClean="0"/>
+              <a:rPr lang="ko-KR" altLang="en-US"/>
               <a:t>넷째 수준</a:t>
             </a:r>
           </a:p>
           <a:p>
             <a:pPr lvl="4"/>
             <a:r>
-              <a:rPr lang="ko-KR" altLang="en-US" smtClean="0"/>
+              <a:rPr lang="ko-KR" altLang="en-US"/>
               <a:t>다섯째 수준</a:t>
             </a:r>
-            <a:endParaRPr lang="ko-KR" altLang="en-US"/>
           </a:p>
         </p:txBody>
       </p:sp>
@@ -1201,38 +1219,37 @@
           <a:p>
             <a:pPr lvl="0"/>
             <a:r>
-              <a:rPr lang="ko-KR" altLang="en-US" smtClean="0"/>
+              <a:rPr lang="ko-KR" altLang="en-US"/>
               <a:t>마스터 텍스트 스타일 편집</a:t>
             </a:r>
           </a:p>
           <a:p>
             <a:pPr lvl="1"/>
             <a:r>
-              <a:rPr lang="ko-KR" altLang="en-US" smtClean="0"/>
+              <a:rPr lang="ko-KR" altLang="en-US"/>
               <a:t>둘째 수준</a:t>
             </a:r>
           </a:p>
           <a:p>
             <a:pPr lvl="2"/>
             <a:r>
-              <a:rPr lang="ko-KR" altLang="en-US" smtClean="0"/>
+              <a:rPr lang="ko-KR" altLang="en-US"/>
               <a:t>셋째 수준</a:t>
             </a:r>
           </a:p>
           <a:p>
             <a:pPr lvl="3"/>
             <a:r>
-              <a:rPr lang="ko-KR" altLang="en-US" smtClean="0"/>
+              <a:rPr lang="ko-KR" altLang="en-US"/>
               <a:t>넷째 수준</a:t>
             </a:r>
           </a:p>
           <a:p>
             <a:pPr lvl="4"/>
             <a:r>
-              <a:rPr lang="ko-KR" altLang="en-US" smtClean="0"/>
+              <a:rPr lang="ko-KR" altLang="en-US"/>
               <a:t>다섯째 수준</a:t>
             </a:r>
-            <a:endParaRPr lang="ko-KR" altLang="en-US"/>
           </a:p>
         </p:txBody>
       </p:sp>
@@ -1253,7 +1270,7 @@
           <a:p>
             <a:fld id="{435661A6-29BF-4182-9B47-9153AD299389}" type="datetimeFigureOut">
               <a:rPr lang="ko-KR" altLang="en-US" smtClean="0"/>
-              <a:t>2026-09-02</a:t>
+              <a:t>2026-09-03</a:t>
             </a:fld>
             <a:endParaRPr lang="ko-KR" altLang="en-US"/>
           </a:p>
@@ -1352,10 +1369,9 @@
           <a:lstStyle/>
           <a:p>
             <a:r>
-              <a:rPr lang="ko-KR" altLang="en-US" smtClean="0"/>
+              <a:rPr lang="ko-KR" altLang="en-US"/>
               <a:t>마스터 제목 스타일 편집</a:t>
             </a:r>
-            <a:endParaRPr lang="ko-KR" altLang="en-US"/>
           </a:p>
         </p:txBody>
       </p:sp>
@@ -1418,7 +1434,7 @@
           <a:p>
             <a:pPr lvl="0"/>
             <a:r>
-              <a:rPr lang="ko-KR" altLang="en-US" smtClean="0"/>
+              <a:rPr lang="ko-KR" altLang="en-US"/>
               <a:t>마스터 텍스트 스타일 편집</a:t>
             </a:r>
           </a:p>
@@ -1446,38 +1462,37 @@
           <a:p>
             <a:pPr lvl="0"/>
             <a:r>
-              <a:rPr lang="ko-KR" altLang="en-US" smtClean="0"/>
+              <a:rPr lang="ko-KR" altLang="en-US"/>
               <a:t>마스터 텍스트 스타일 편집</a:t>
             </a:r>
           </a:p>
           <a:p>
             <a:pPr lvl="1"/>
             <a:r>
-              <a:rPr lang="ko-KR" altLang="en-US" smtClean="0"/>
+              <a:rPr lang="ko-KR" altLang="en-US"/>
               <a:t>둘째 수준</a:t>
             </a:r>
           </a:p>
           <a:p>
             <a:pPr lvl="2"/>
             <a:r>
-              <a:rPr lang="ko-KR" altLang="en-US" smtClean="0"/>
+              <a:rPr lang="ko-KR" altLang="en-US"/>
               <a:t>셋째 수준</a:t>
             </a:r>
           </a:p>
           <a:p>
             <a:pPr lvl="3"/>
             <a:r>
-              <a:rPr lang="ko-KR" altLang="en-US" smtClean="0"/>
+              <a:rPr lang="ko-KR" altLang="en-US"/>
               <a:t>넷째 수준</a:t>
             </a:r>
           </a:p>
           <a:p>
             <a:pPr lvl="4"/>
             <a:r>
-              <a:rPr lang="ko-KR" altLang="en-US" smtClean="0"/>
+              <a:rPr lang="ko-KR" altLang="en-US"/>
               <a:t>다섯째 수준</a:t>
             </a:r>
-            <a:endParaRPr lang="ko-KR" altLang="en-US"/>
           </a:p>
         </p:txBody>
       </p:sp>
@@ -1540,7 +1555,7 @@
           <a:p>
             <a:pPr lvl="0"/>
             <a:r>
-              <a:rPr lang="ko-KR" altLang="en-US" smtClean="0"/>
+              <a:rPr lang="ko-KR" altLang="en-US"/>
               <a:t>마스터 텍스트 스타일 편집</a:t>
             </a:r>
           </a:p>
@@ -1568,38 +1583,37 @@
           <a:p>
             <a:pPr lvl="0"/>
             <a:r>
-              <a:rPr lang="ko-KR" altLang="en-US" smtClean="0"/>
+              <a:rPr lang="ko-KR" altLang="en-US"/>
               <a:t>마스터 텍스트 스타일 편집</a:t>
             </a:r>
           </a:p>
           <a:p>
             <a:pPr lvl="1"/>
             <a:r>
-              <a:rPr lang="ko-KR" altLang="en-US" smtClean="0"/>
+              <a:rPr lang="ko-KR" altLang="en-US"/>
               <a:t>둘째 수준</a:t>
             </a:r>
           </a:p>
           <a:p>
             <a:pPr lvl="2"/>
             <a:r>
-              <a:rPr lang="ko-KR" altLang="en-US" smtClean="0"/>
+              <a:rPr lang="ko-KR" altLang="en-US"/>
               <a:t>셋째 수준</a:t>
             </a:r>
           </a:p>
           <a:p>
             <a:pPr lvl="3"/>
             <a:r>
-              <a:rPr lang="ko-KR" altLang="en-US" smtClean="0"/>
+              <a:rPr lang="ko-KR" altLang="en-US"/>
               <a:t>넷째 수준</a:t>
             </a:r>
           </a:p>
           <a:p>
             <a:pPr lvl="4"/>
             <a:r>
-              <a:rPr lang="ko-KR" altLang="en-US" smtClean="0"/>
+              <a:rPr lang="ko-KR" altLang="en-US"/>
               <a:t>다섯째 수준</a:t>
             </a:r>
-            <a:endParaRPr lang="ko-KR" altLang="en-US"/>
           </a:p>
         </p:txBody>
       </p:sp>
@@ -1620,7 +1634,7 @@
           <a:p>
             <a:fld id="{435661A6-29BF-4182-9B47-9153AD299389}" type="datetimeFigureOut">
               <a:rPr lang="ko-KR" altLang="en-US" smtClean="0"/>
-              <a:t>2026-09-02</a:t>
+              <a:t>2026-09-03</a:t>
             </a:fld>
             <a:endParaRPr lang="ko-KR" altLang="en-US"/>
           </a:p>
@@ -1714,10 +1728,9 @@
           <a:lstStyle/>
           <a:p>
             <a:r>
-              <a:rPr lang="ko-KR" altLang="en-US" smtClean="0"/>
+              <a:rPr lang="ko-KR" altLang="en-US"/>
               <a:t>마스터 제목 스타일 편집</a:t>
             </a:r>
-            <a:endParaRPr lang="ko-KR" altLang="en-US"/>
           </a:p>
         </p:txBody>
       </p:sp>
@@ -1738,7 +1751,7 @@
           <a:p>
             <a:fld id="{435661A6-29BF-4182-9B47-9153AD299389}" type="datetimeFigureOut">
               <a:rPr lang="ko-KR" altLang="en-US" smtClean="0"/>
-              <a:t>2026-09-02</a:t>
+              <a:t>2026-09-03</a:t>
             </a:fld>
             <a:endParaRPr lang="ko-KR" altLang="en-US"/>
           </a:p>
@@ -1833,7 +1846,7 @@
           <a:p>
             <a:fld id="{435661A6-29BF-4182-9B47-9153AD299389}" type="datetimeFigureOut">
               <a:rPr lang="ko-KR" altLang="en-US" smtClean="0"/>
-              <a:t>2026-09-02</a:t>
+              <a:t>2026-09-03</a:t>
             </a:fld>
             <a:endParaRPr lang="ko-KR" altLang="en-US"/>
           </a:p>
@@ -1936,10 +1949,9 @@
           </a:lstStyle>
           <a:p>
             <a:r>
-              <a:rPr lang="ko-KR" altLang="en-US" smtClean="0"/>
+              <a:rPr lang="ko-KR" altLang="en-US"/>
               <a:t>마스터 제목 스타일 편집</a:t>
             </a:r>
-            <a:endParaRPr lang="ko-KR" altLang="en-US"/>
           </a:p>
         </p:txBody>
       </p:sp>
@@ -1993,38 +2005,37 @@
           <a:p>
             <a:pPr lvl="0"/>
             <a:r>
-              <a:rPr lang="ko-KR" altLang="en-US" smtClean="0"/>
+              <a:rPr lang="ko-KR" altLang="en-US"/>
               <a:t>마스터 텍스트 스타일 편집</a:t>
             </a:r>
           </a:p>
           <a:p>
             <a:pPr lvl="1"/>
             <a:r>
-              <a:rPr lang="ko-KR" altLang="en-US" smtClean="0"/>
+              <a:rPr lang="ko-KR" altLang="en-US"/>
               <a:t>둘째 수준</a:t>
             </a:r>
           </a:p>
           <a:p>
             <a:pPr lvl="2"/>
             <a:r>
-              <a:rPr lang="ko-KR" altLang="en-US" smtClean="0"/>
+              <a:rPr lang="ko-KR" altLang="en-US"/>
               <a:t>셋째 수준</a:t>
             </a:r>
           </a:p>
           <a:p>
             <a:pPr lvl="3"/>
             <a:r>
-              <a:rPr lang="ko-KR" altLang="en-US" smtClean="0"/>
+              <a:rPr lang="ko-KR" altLang="en-US"/>
               <a:t>넷째 수준</a:t>
             </a:r>
           </a:p>
           <a:p>
             <a:pPr lvl="4"/>
             <a:r>
-              <a:rPr lang="ko-KR" altLang="en-US" smtClean="0"/>
+              <a:rPr lang="ko-KR" altLang="en-US"/>
               <a:t>다섯째 수준</a:t>
             </a:r>
-            <a:endParaRPr lang="ko-KR" altLang="en-US"/>
           </a:p>
         </p:txBody>
       </p:sp>
@@ -2087,7 +2098,7 @@
           <a:p>
             <a:pPr lvl="0"/>
             <a:r>
-              <a:rPr lang="ko-KR" altLang="en-US" smtClean="0"/>
+              <a:rPr lang="ko-KR" altLang="en-US"/>
               <a:t>마스터 텍스트 스타일 편집</a:t>
             </a:r>
           </a:p>
@@ -2110,7 +2121,7 @@
           <a:p>
             <a:fld id="{435661A6-29BF-4182-9B47-9153AD299389}" type="datetimeFigureOut">
               <a:rPr lang="ko-KR" altLang="en-US" smtClean="0"/>
-              <a:t>2026-09-02</a:t>
+              <a:t>2026-09-03</a:t>
             </a:fld>
             <a:endParaRPr lang="ko-KR" altLang="en-US"/>
           </a:p>
@@ -2213,10 +2224,9 @@
           </a:lstStyle>
           <a:p>
             <a:r>
-              <a:rPr lang="ko-KR" altLang="en-US" smtClean="0"/>
+              <a:rPr lang="ko-KR" altLang="en-US"/>
               <a:t>마스터 제목 스타일 편집</a:t>
             </a:r>
-            <a:endParaRPr lang="ko-KR" altLang="en-US"/>
           </a:p>
         </p:txBody>
       </p:sp>
@@ -2340,7 +2350,7 @@
           <a:p>
             <a:pPr lvl="0"/>
             <a:r>
-              <a:rPr lang="ko-KR" altLang="en-US" smtClean="0"/>
+              <a:rPr lang="ko-KR" altLang="en-US"/>
               <a:t>마스터 텍스트 스타일 편집</a:t>
             </a:r>
           </a:p>
@@ -2363,7 +2373,7 @@
           <a:p>
             <a:fld id="{435661A6-29BF-4182-9B47-9153AD299389}" type="datetimeFigureOut">
               <a:rPr lang="ko-KR" altLang="en-US" smtClean="0"/>
-              <a:t>2026-09-02</a:t>
+              <a:t>2026-09-03</a:t>
             </a:fld>
             <a:endParaRPr lang="ko-KR" altLang="en-US"/>
           </a:p>
@@ -2472,10 +2482,9 @@
           <a:lstStyle/>
           <a:p>
             <a:r>
-              <a:rPr lang="ko-KR" altLang="en-US" smtClean="0"/>
+              <a:rPr lang="ko-KR" altLang="en-US"/>
               <a:t>마스터 제목 스타일 편집</a:t>
             </a:r>
-            <a:endParaRPr lang="ko-KR" altLang="en-US"/>
           </a:p>
         </p:txBody>
       </p:sp>
@@ -2506,38 +2515,37 @@
           <a:p>
             <a:pPr lvl="0"/>
             <a:r>
-              <a:rPr lang="ko-KR" altLang="en-US" smtClean="0"/>
+              <a:rPr lang="ko-KR" altLang="en-US"/>
               <a:t>마스터 텍스트 스타일 편집</a:t>
             </a:r>
           </a:p>
           <a:p>
             <a:pPr lvl="1"/>
             <a:r>
-              <a:rPr lang="ko-KR" altLang="en-US" smtClean="0"/>
+              <a:rPr lang="ko-KR" altLang="en-US"/>
               <a:t>둘째 수준</a:t>
             </a:r>
           </a:p>
           <a:p>
             <a:pPr lvl="2"/>
             <a:r>
-              <a:rPr lang="ko-KR" altLang="en-US" smtClean="0"/>
+              <a:rPr lang="ko-KR" altLang="en-US"/>
               <a:t>셋째 수준</a:t>
             </a:r>
           </a:p>
           <a:p>
             <a:pPr lvl="3"/>
             <a:r>
-              <a:rPr lang="ko-KR" altLang="en-US" smtClean="0"/>
+              <a:rPr lang="ko-KR" altLang="en-US"/>
               <a:t>넷째 수준</a:t>
             </a:r>
           </a:p>
           <a:p>
             <a:pPr lvl="4"/>
             <a:r>
-              <a:rPr lang="ko-KR" altLang="en-US" smtClean="0"/>
+              <a:rPr lang="ko-KR" altLang="en-US"/>
               <a:t>다섯째 수준</a:t>
             </a:r>
-            <a:endParaRPr lang="ko-KR" altLang="en-US"/>
           </a:p>
         </p:txBody>
       </p:sp>
@@ -2576,7 +2584,7 @@
           <a:p>
             <a:fld id="{435661A6-29BF-4182-9B47-9153AD299389}" type="datetimeFigureOut">
               <a:rPr lang="ko-KR" altLang="en-US" smtClean="0"/>
-              <a:t>2026-09-02</a:t>
+              <a:t>2026-09-03</a:t>
             </a:fld>
             <a:endParaRPr lang="ko-KR" altLang="en-US"/>
           </a:p>
@@ -3051,11 +3059,11 @@
           <a:lstStyle/>
           <a:p>
             <a:r>
-              <a:rPr lang="ko-KR" altLang="en-US" smtClean="0"/>
+              <a:rPr lang="ko-KR" altLang="en-US"/>
               <a:t>약속에 대한 상황별 순서도를 만든다</a:t>
             </a:r>
             <a:r>
-              <a:rPr lang="en-US" altLang="ko-KR" smtClean="0"/>
+              <a:rPr lang="en-US" altLang="ko-KR"/>
               <a:t>.</a:t>
             </a:r>
             <a:endParaRPr lang="ko-KR" altLang="en-US"/>
@@ -3078,11 +3086,11 @@
           <a:lstStyle/>
           <a:p>
             <a:r>
-              <a:rPr lang="ko-KR" altLang="en-US" smtClean="0"/>
+              <a:rPr lang="ko-KR" altLang="en-US"/>
               <a:t>각각의 상황별로 어떻게 약속을 설계했는지 작성해보자</a:t>
             </a:r>
             <a:r>
-              <a:rPr lang="en-US" altLang="ko-KR" smtClean="0"/>
+              <a:rPr lang="en-US" altLang="ko-KR"/>
               <a:t>.</a:t>
             </a:r>
           </a:p>
